--- a/decks/day4/module-1-agents-vs-workflows.pptx
+++ b/decks/day4/module-1-agents-vs-workflows.pptx
@@ -16,9 +16,10 @@
     <p:sldId id="264" r:id="rId10"/>
     <p:sldId id="265" r:id="rId11"/>
     <p:sldId id="266" r:id="rId12"/>
+    <p:sldId id="267" r:id="rId13"/>
   </p:sldIdLst>
   <p:notesMasterIdLst>
-    <p:notesMasterId r:id="rId13"/>
+    <p:notesMasterId r:id="rId14"/>
   </p:notesMasterIdLst>
   <p:sldSz cx="9144000" cy="5143500"/>
   <p:notesSz cx="5143500" cy="9144000"/>
@@ -601,8 +602,8 @@
           <a:p>
             <a:r>
               <a:rPr lang="en-US" dirty="0"/>
-              <a:t>• This closes Module 1's arc: from the lightest composition pattern, to crossing a boundary, to explicit orchestration, and back to looking like a single agent again. Module 2 picks up "workflows" in depth; Modules 3-6 build out the rest.
-• GROUNDING SOURCE: https://learn.microsoft.com/agent-framework/journey/workflows</a:t>
+              <a:t>• Placeholder marker slide — the runbook has full narration, setup, and fallback plan. Step 1 runs the official sequential_workflow_as_agent.py sample as-is; Step 2 is a minimal, clearly-noted comparison script (with/without intermediate_output_from).
+• GROUNDING SOURCE: https://github.com/microsoft/agent-framework/blob/main/python/samples/03-workflows/agents/sequential_workflow_as_agent.py</a:t>
             </a:r>
             <a:endParaRPr lang="en-US" dirty="0"/>
           </a:p>
@@ -690,9 +691,8 @@
           <a:p>
             <a:r>
               <a:rPr lang="en-US" dirty="0"/>
-              <a:t>• Ask attendees which of today's four composition mechanics applies to the lab's Planner/Retriever/Critic workflow. Answer: workflows (explicit graph) for the core loop, with workflows-as-agents as the optional wrapping if the whole thing needs to be called from elsewhere.
-• GROUNDING SOURCE: https://learn.microsoft.com/agent-framework/journey/workflows
-• GROUNDING SOURCE: https://learn.microsoft.com/agent-framework/journey/agent-to-agent</a:t>
+              <a:t>• This closes Module 1's arc: from the lightest composition pattern, to crossing a boundary, to explicit orchestration, and back to looking like a single agent again. Module 2 picks up "workflows" in depth; Modules 3-6 build out the rest.
+• GROUNDING SOURCE: https://learn.microsoft.com/agent-framework/journey/workflows</a:t>
             </a:r>
             <a:endParaRPr lang="en-US" dirty="0"/>
           </a:p>
@@ -716,6 +716,96 @@
             <a:fld id="{F7021451-1387-4CA6-816F-3879F97B5CBC}" type="slidenum">
               <a:rPr lang="en-US"/>
               <a:t>11</a:t>
+            </a:fld>
+            <a:endParaRPr lang="en-US"/>
+          </a:p>
+        </p:txBody>
+      </p:sp>
+    </p:spTree>
+    <p:extLst>
+      <p:ext uri="{BB962C8B-B14F-4D97-AF65-F5344CB8AC3E}">
+        <p14:creationId xmlns:p14="http://schemas.microsoft.com/office/powerpoint/2010/main" val="1024086991"/>
+      </p:ext>
+    </p:extLst>
+  </p:cSld>
+  <p:clrMapOvr>
+    <a:masterClrMapping/>
+  </p:clrMapOvr>
+</p:notes>
+</file>
+
+<file path=ppt/notesSlides/notesSlide12.xml><?xml version="1.0" encoding="utf-8"?>
+<p:notes xmlns:a="http://schemas.openxmlformats.org/drawingml/2006/main" xmlns:r="http://schemas.openxmlformats.org/officeDocument/2006/relationships" xmlns:p="http://schemas.openxmlformats.org/presentationml/2006/main">
+  <p:cSld>
+    <p:spTree>
+      <p:nvGrpSpPr>
+        <p:cNvPr id="1" name=""/>
+        <p:cNvGrpSpPr/>
+        <p:nvPr/>
+      </p:nvGrpSpPr>
+      <p:grpSpPr>
+        <a:xfrm>
+          <a:off x="0" y="0"/>
+          <a:ext cx="0" cy="0"/>
+          <a:chOff x="0" y="0"/>
+          <a:chExt cx="0" cy="0"/>
+        </a:xfrm>
+      </p:grpSpPr>
+      <p:sp>
+        <p:nvSpPr>
+          <p:cNvPr id="2" name="Slide Image Placeholder 1"/>
+          <p:cNvSpPr>
+            <a:spLocks noGrp="1" noRot="1" noChangeAspect="1"/>
+          </p:cNvSpPr>
+          <p:nvPr>
+            <p:ph type="sldImg"/>
+          </p:nvPr>
+        </p:nvSpPr>
+        <p:spPr/>
+      </p:sp>
+      <p:sp>
+        <p:nvSpPr>
+          <p:cNvPr id="3" name="Notes Placeholder 2"/>
+          <p:cNvSpPr>
+            <a:spLocks noGrp="1"/>
+          </p:cNvSpPr>
+          <p:nvPr>
+            <p:ph type="body" idx="1"/>
+          </p:nvPr>
+        </p:nvSpPr>
+        <p:spPr/>
+        <p:txBody>
+          <a:bodyPr/>
+          <a:lstStyle/>
+          <a:p>
+            <a:r>
+              <a:rPr lang="en-US" dirty="0"/>
+              <a:t>• Ask attendees which of today's four composition mechanics applies to the lab's Planner/Retriever/Critic workflow. Answer: workflows (explicit graph) for the core loop, with workflows-as-agents as the optional wrapping if the whole thing needs to be called from elsewhere.
+• GROUNDING SOURCE: https://learn.microsoft.com/agent-framework/journey/workflows
+• GROUNDING SOURCE: https://learn.microsoft.com/agent-framework/journey/agent-to-agent</a:t>
+            </a:r>
+            <a:endParaRPr lang="en-US" dirty="0"/>
+          </a:p>
+        </p:txBody>
+      </p:sp>
+      <p:sp>
+        <p:nvSpPr>
+          <p:cNvPr id="4" name="Slide Number Placeholder 3"/>
+          <p:cNvSpPr>
+            <a:spLocks noGrp="1"/>
+          </p:cNvSpPr>
+          <p:nvPr>
+            <p:ph type="sldNum" sz="quarter" idx="10"/>
+          </p:nvPr>
+        </p:nvSpPr>
+        <p:spPr/>
+        <p:txBody>
+          <a:bodyPr/>
+          <a:lstStyle/>
+          <a:p>
+            <a:fld id="{F7021451-1387-4CA6-816F-3879F97B5CBC}" type="slidenum">
+              <a:rPr lang="en-US"/>
+              <a:t>12</a:t>
             </a:fld>
             <a:endParaRPr lang="en-US"/>
           </a:p>
@@ -2011,6 +2101,359 @@
     <p:bg>
       <p:bgPr>
         <a:solidFill>
+          <a:srgbClr val="CADCFC"/>
+        </a:solidFill>
+      </p:bgPr>
+    </p:bg>
+    <p:spTree>
+      <p:nvGrpSpPr>
+        <p:cNvPr id="1" name=""/>
+        <p:cNvGrpSpPr/>
+        <p:nvPr/>
+      </p:nvGrpSpPr>
+      <p:grpSpPr>
+        <a:xfrm>
+          <a:off x="0" y="0"/>
+          <a:ext cx="0" cy="0"/>
+          <a:chOff x="0" y="0"/>
+          <a:chExt cx="0" cy="0"/>
+        </a:xfrm>
+      </p:grpSpPr>
+      <p:sp>
+        <p:nvSpPr>
+          <p:cNvPr id="2" name="Shape 0"/>
+          <p:cNvSpPr/>
+          <p:nvPr/>
+        </p:nvSpPr>
+        <p:spPr>
+          <a:xfrm>
+            <a:off x="0" y="0"/>
+            <a:ext cx="146304" cy="5143500"/>
+          </a:xfrm>
+          <a:prstGeom prst="rect">
+            <a:avLst/>
+          </a:prstGeom>
+          <a:solidFill>
+            <a:srgbClr val="1E2761"/>
+          </a:solidFill>
+          <a:ln/>
+        </p:spPr>
+      </p:sp>
+      <p:sp>
+        <p:nvSpPr>
+          <p:cNvPr id="3" name="Text 1"/>
+          <p:cNvSpPr/>
+          <p:nvPr/>
+        </p:nvSpPr>
+        <p:spPr>
+          <a:xfrm>
+            <a:off x="5669280" y="274320"/>
+            <a:ext cx="3291840" cy="274320"/>
+          </a:xfrm>
+          <a:prstGeom prst="rect">
+            <a:avLst/>
+          </a:prstGeom>
+          <a:noFill/>
+          <a:ln/>
+        </p:spPr>
+        <p:txBody>
+          <a:bodyPr wrap="square" lIns="0" tIns="0" rIns="0" bIns="0" rtlCol="0" anchor="ctr"/>
+          <a:lstStyle/>
+          <a:p>
+            <a:pPr algn="r" indent="0" marL="0">
+              <a:buNone/>
+            </a:pPr>
+            <a:r>
+              <a:rPr lang="en-US" sz="1000" dirty="0">
+                <a:solidFill>
+                  <a:srgbClr val="6B7280"/>
+                </a:solidFill>
+                <a:latin typeface="Calibri" pitchFamily="34" charset="0"/>
+                <a:ea typeface="Calibri" pitchFamily="34" charset="-122"/>
+                <a:cs typeface="Calibri" pitchFamily="34" charset="-120"/>
+              </a:rPr>
+              <a:t>Day 4 · Module 1 · Demo</a:t>
+            </a:r>
+            <a:endParaRPr lang="en-US" sz="1000" dirty="0"/>
+          </a:p>
+        </p:txBody>
+      </p:sp>
+      <p:sp>
+        <p:nvSpPr>
+          <p:cNvPr id="4" name="Text 2"/>
+          <p:cNvSpPr/>
+          <p:nvPr/>
+        </p:nvSpPr>
+        <p:spPr>
+          <a:xfrm>
+            <a:off x="548640" y="1051560"/>
+            <a:ext cx="5486400" cy="502920"/>
+          </a:xfrm>
+          <a:prstGeom prst="rect">
+            <a:avLst/>
+          </a:prstGeom>
+          <a:noFill/>
+          <a:ln/>
+        </p:spPr>
+        <p:txBody>
+          <a:bodyPr wrap="square" lIns="0" tIns="0" rIns="0" bIns="0" rtlCol="0" anchor="ctr"/>
+          <a:lstStyle/>
+          <a:p>
+            <a:pPr indent="0" marL="0">
+              <a:buNone/>
+            </a:pPr>
+            <a:r>
+              <a:rPr lang="en-US" sz="3200" b="1" spc="800" kern="0" dirty="0">
+                <a:solidFill>
+                  <a:srgbClr val="1E2761"/>
+                </a:solidFill>
+                <a:latin typeface="Calibri" pitchFamily="34" charset="0"/>
+                <a:ea typeface="Calibri" pitchFamily="34" charset="-122"/>
+                <a:cs typeface="Calibri" pitchFamily="34" charset="-120"/>
+              </a:rPr>
+              <a:t>DEMO</a:t>
+            </a:r>
+            <a:endParaRPr lang="en-US" sz="3200" dirty="0"/>
+          </a:p>
+        </p:txBody>
+      </p:sp>
+      <p:sp>
+        <p:nvSpPr>
+          <p:cNvPr id="5" name="Text 3"/>
+          <p:cNvSpPr/>
+          <p:nvPr/>
+        </p:nvSpPr>
+        <p:spPr>
+          <a:xfrm>
+            <a:off x="548640" y="1691640"/>
+            <a:ext cx="8046720" cy="914400"/>
+          </a:xfrm>
+          <a:prstGeom prst="rect">
+            <a:avLst/>
+          </a:prstGeom>
+          <a:noFill/>
+          <a:ln/>
+        </p:spPr>
+        <p:txBody>
+          <a:bodyPr wrap="square" lIns="0" tIns="0" rIns="0" bIns="0" rtlCol="0" anchor="ctr"/>
+          <a:lstStyle/>
+          <a:p>
+            <a:pPr indent="0" marL="0">
+              <a:buNone/>
+            </a:pPr>
+            <a:r>
+              <a:rPr lang="en-US" sz="3000" b="1" dirty="0">
+                <a:solidFill>
+                  <a:srgbClr val="1E2761"/>
+                </a:solidFill>
+                <a:latin typeface="Calibri" pitchFamily="34" charset="0"/>
+                <a:ea typeface="Calibri" pitchFamily="34" charset="-122"/>
+                <a:cs typeface="Calibri" pitchFamily="34" charset="-120"/>
+              </a:rPr>
+              <a:t>Wrap a workflow, call it like any other agent</a:t>
+            </a:r>
+            <a:endParaRPr lang="en-US" sz="3000" dirty="0"/>
+          </a:p>
+        </p:txBody>
+      </p:sp>
+      <p:sp>
+        <p:nvSpPr>
+          <p:cNvPr id="6" name="Text 4"/>
+          <p:cNvSpPr/>
+          <p:nvPr/>
+        </p:nvSpPr>
+        <p:spPr>
+          <a:xfrm>
+            <a:off x="6583680" y="1051560"/>
+            <a:ext cx="2194560" cy="502920"/>
+          </a:xfrm>
+          <a:prstGeom prst="rect">
+            <a:avLst/>
+          </a:prstGeom>
+          <a:noFill/>
+          <a:ln/>
+        </p:spPr>
+        <p:txBody>
+          <a:bodyPr wrap="square" lIns="0" tIns="0" rIns="0" bIns="0" rtlCol="0" anchor="ctr"/>
+          <a:lstStyle/>
+          <a:p>
+            <a:pPr algn="r" indent="0" marL="0">
+              <a:buNone/>
+            </a:pPr>
+            <a:r>
+              <a:rPr lang="en-US" sz="1800" i="1" dirty="0">
+                <a:solidFill>
+                  <a:srgbClr val="6B7280"/>
+                </a:solidFill>
+                <a:latin typeface="Calibri" pitchFamily="34" charset="0"/>
+                <a:ea typeface="Calibri" pitchFamily="34" charset="-122"/>
+                <a:cs typeface="Calibri" pitchFamily="34" charset="-120"/>
+              </a:rPr>
+              <a:t>~4 min</a:t>
+            </a:r>
+            <a:endParaRPr lang="en-US" sz="1800" dirty="0"/>
+          </a:p>
+        </p:txBody>
+      </p:sp>
+      <p:sp>
+        <p:nvSpPr>
+          <p:cNvPr id="7" name="Text 5"/>
+          <p:cNvSpPr/>
+          <p:nvPr/>
+        </p:nvSpPr>
+        <p:spPr>
+          <a:xfrm>
+            <a:off x="548640" y="2788920"/>
+            <a:ext cx="8046720" cy="1371600"/>
+          </a:xfrm>
+          <a:prstGeom prst="rect">
+            <a:avLst/>
+          </a:prstGeom>
+          <a:noFill/>
+          <a:ln/>
+        </p:spPr>
+        <p:txBody>
+          <a:bodyPr wrap="square" lIns="0" tIns="0" rIns="0" bIns="0" rtlCol="0" anchor="ctr"/>
+          <a:lstStyle/>
+          <a:p>
+            <a:pPr indent="0" marL="0">
+              <a:spcAft>
+                <a:spcPts val="600"/>
+              </a:spcAft>
+              <a:buNone/>
+            </a:pPr>
+            <a:r>
+              <a:rPr lang="en-US" sz="1600" dirty="0">
+                <a:solidFill>
+                  <a:srgbClr val="212121"/>
+                </a:solidFill>
+                <a:latin typeface="Calibri" pitchFamily="34" charset="0"/>
+                <a:ea typeface="Calibri" pitchFamily="34" charset="-122"/>
+                <a:cs typeface="Calibri" pitchFamily="34" charset="-120"/>
+              </a:rPr>
+              <a:t>Run the official sequential_workflow_as_agent.py sample live: a two-agent writer→reviewer pipeline wrapped as an agent returns exactly one message, matching the previous slide's code. Then run a comparison script that builds the SAME workflow with and without intermediate_output_from=[writer] — proving .as_agent() exposes only whatever output designation the workflow already had, nothing more.</a:t>
+            </a:r>
+            <a:endParaRPr lang="en-US" sz="1600" dirty="0"/>
+          </a:p>
+        </p:txBody>
+      </p:sp>
+      <p:sp>
+        <p:nvSpPr>
+          <p:cNvPr id="8" name="Text 6"/>
+          <p:cNvSpPr/>
+          <p:nvPr/>
+        </p:nvSpPr>
+        <p:spPr>
+          <a:xfrm>
+            <a:off x="548640" y="4434840"/>
+            <a:ext cx="8046720" cy="320040"/>
+          </a:xfrm>
+          <a:prstGeom prst="rect">
+            <a:avLst/>
+          </a:prstGeom>
+          <a:noFill/>
+          <a:ln/>
+        </p:spPr>
+        <p:txBody>
+          <a:bodyPr wrap="square" lIns="0" tIns="0" rIns="0" bIns="0" rtlCol="0" anchor="ctr"/>
+          <a:lstStyle/>
+          <a:p>
+            <a:pPr indent="0" marL="0">
+              <a:buNone/>
+            </a:pPr>
+            <a:r>
+              <a:rPr lang="en-US" sz="1100" i="1" dirty="0">
+                <a:solidFill>
+                  <a:srgbClr val="6B7280"/>
+                </a:solidFill>
+                <a:latin typeface="Calibri" pitchFamily="34" charset="0"/>
+                <a:ea typeface="Calibri" pitchFamily="34" charset="-122"/>
+                <a:cs typeface="Calibri" pitchFamily="34" charset="-120"/>
+              </a:rPr>
+              <a:t>Runbook: demos/day4/module-1-demo-1-workflow-as-agent.md</a:t>
+            </a:r>
+            <a:endParaRPr lang="en-US" sz="1100" dirty="0"/>
+          </a:p>
+        </p:txBody>
+      </p:sp>
+      <p:sp>
+        <p:nvSpPr>
+          <p:cNvPr id="9" name="Shape 7"/>
+          <p:cNvSpPr/>
+          <p:nvPr/>
+        </p:nvSpPr>
+        <p:spPr>
+          <a:xfrm>
+            <a:off x="365760" y="4773168"/>
+            <a:ext cx="8412480" cy="0"/>
+          </a:xfrm>
+          <a:prstGeom prst="line">
+            <a:avLst/>
+          </a:prstGeom>
+          <a:noFill/>
+          <a:ln w="6350">
+            <a:solidFill>
+              <a:srgbClr val="D1D5DB"/>
+            </a:solidFill>
+            <a:prstDash val="solid"/>
+          </a:ln>
+        </p:spPr>
+      </p:sp>
+      <p:sp>
+        <p:nvSpPr>
+          <p:cNvPr id="10" name="Text 8"/>
+          <p:cNvSpPr/>
+          <p:nvPr/>
+        </p:nvSpPr>
+        <p:spPr>
+          <a:xfrm>
+            <a:off x="384048" y="4818888"/>
+            <a:ext cx="8275320" cy="182880"/>
+          </a:xfrm>
+          <a:prstGeom prst="rect">
+            <a:avLst/>
+          </a:prstGeom>
+          <a:noFill/>
+          <a:ln/>
+        </p:spPr>
+        <p:txBody>
+          <a:bodyPr wrap="square" lIns="0" tIns="0" rIns="0" bIns="0" rtlCol="0" anchor="ctr">
+            <a:normAutofit/>
+          </a:bodyPr>
+          <a:lstStyle/>
+          <a:p>
+            <a:pPr indent="0" marL="0">
+              <a:buNone/>
+            </a:pPr>
+            <a:r>
+              <a:rPr lang="en-US" sz="820" dirty="0">
+                <a:solidFill>
+                  <a:srgbClr val="6B7280"/>
+                </a:solidFill>
+                <a:latin typeface="Calibri" pitchFamily="34" charset="0"/>
+                <a:ea typeface="Calibri" pitchFamily="34" charset="-122"/>
+                <a:cs typeface="Calibri" pitchFamily="34" charset="-120"/>
+              </a:rPr>
+              <a:t>Source: https://github.com/microsoft/agent-framework/blob/main/python/samples/03-workflows/agents/sequential_workflow_as_agent.py</a:t>
+            </a:r>
+            <a:endParaRPr lang="en-US" sz="820" dirty="0"/>
+          </a:p>
+        </p:txBody>
+      </p:sp>
+    </p:spTree>
+  </p:cSld>
+  <p:clrMapOvr>
+    <a:masterClrMapping/>
+  </p:clrMapOvr>
+</p:sld>
+</file>
+
+<file path=ppt/slides/slide11.xml><?xml version="1.0" encoding="utf-8"?>
+<p:sld xmlns:a="http://schemas.openxmlformats.org/drawingml/2006/main" xmlns:r="http://schemas.openxmlformats.org/officeDocument/2006/relationships" xmlns:p="http://schemas.openxmlformats.org/presentationml/2006/main">
+  <p:cSld name="Slide 11">
+    <p:bg>
+      <p:bgPr>
+        <a:solidFill>
           <a:srgbClr val="FFFFFF"/>
         </a:solidFill>
       </p:bgPr>
@@ -2935,9 +3378,9 @@
 </p:sld>
 </file>
 
-<file path=ppt/slides/slide11.xml><?xml version="1.0" encoding="utf-8"?>
+<file path=ppt/slides/slide12.xml><?xml version="1.0" encoding="utf-8"?>
 <p:sld xmlns:a="http://schemas.openxmlformats.org/drawingml/2006/main" xmlns:r="http://schemas.openxmlformats.org/officeDocument/2006/relationships" xmlns:p="http://schemas.openxmlformats.org/presentationml/2006/main">
-  <p:cSld name="Slide 11">
+  <p:cSld name="Slide 12">
     <p:bg>
       <p:bgPr>
         <a:solidFill>

--- a/decks/day4/module-1-agents-vs-workflows.pptx
+++ b/decks/day4/module-1-agents-vs-workflows.pptx
@@ -2669,16 +2669,16 @@
         <p:spPr>
           <a:xfrm>
             <a:off x="896112" y="1335024"/>
-            <a:ext cx="1252728" cy="310896"/>
-          </a:xfrm>
-          <a:prstGeom prst="rect">
-            <a:avLst/>
-          </a:prstGeom>
-          <a:noFill/>
-          <a:ln/>
-        </p:spPr>
-        <p:txBody>
-          <a:bodyPr wrap="square" lIns="0" tIns="0" rIns="0" bIns="0" rtlCol="0" anchor="ctr">
+            <a:ext cx="1252728" cy="549402"/>
+          </a:xfrm>
+          <a:prstGeom prst="rect">
+            <a:avLst/>
+          </a:prstGeom>
+          <a:noFill/>
+          <a:ln/>
+        </p:spPr>
+        <p:txBody>
+          <a:bodyPr wrap="square" lIns="0" tIns="0" rIns="0" bIns="0" rtlCol="0" anchor="t">
             <a:normAutofit/>
           </a:bodyPr>
           <a:lstStyle/>
@@ -2709,8 +2709,8 @@
         </p:nvSpPr>
         <p:spPr>
           <a:xfrm>
-            <a:off x="512064" y="1719072"/>
-            <a:ext cx="1618488" cy="1527048"/>
+            <a:off x="512064" y="1939290"/>
+            <a:ext cx="1618488" cy="1334262"/>
           </a:xfrm>
           <a:prstGeom prst="rect">
             <a:avLst/>
@@ -2857,16 +2857,16 @@
         <p:spPr>
           <a:xfrm>
             <a:off x="3063240" y="1335024"/>
-            <a:ext cx="1252728" cy="310896"/>
-          </a:xfrm>
-          <a:prstGeom prst="rect">
-            <a:avLst/>
-          </a:prstGeom>
-          <a:noFill/>
-          <a:ln/>
-        </p:spPr>
-        <p:txBody>
-          <a:bodyPr wrap="square" lIns="0" tIns="0" rIns="0" bIns="0" rtlCol="0" anchor="ctr">
+            <a:ext cx="1252728" cy="549402"/>
+          </a:xfrm>
+          <a:prstGeom prst="rect">
+            <a:avLst/>
+          </a:prstGeom>
+          <a:noFill/>
+          <a:ln/>
+        </p:spPr>
+        <p:txBody>
+          <a:bodyPr wrap="square" lIns="0" tIns="0" rIns="0" bIns="0" rtlCol="0" anchor="t">
             <a:normAutofit/>
           </a:bodyPr>
           <a:lstStyle/>
@@ -2897,8 +2897,8 @@
         </p:nvSpPr>
         <p:spPr>
           <a:xfrm>
-            <a:off x="2679192" y="1719072"/>
-            <a:ext cx="1618488" cy="1527048"/>
+            <a:off x="2679192" y="1939290"/>
+            <a:ext cx="1618488" cy="1334262"/>
           </a:xfrm>
           <a:prstGeom prst="rect">
             <a:avLst/>
@@ -3045,16 +3045,16 @@
         <p:spPr>
           <a:xfrm>
             <a:off x="5230368" y="1335024"/>
-            <a:ext cx="1252728" cy="310896"/>
-          </a:xfrm>
-          <a:prstGeom prst="rect">
-            <a:avLst/>
-          </a:prstGeom>
-          <a:noFill/>
-          <a:ln/>
-        </p:spPr>
-        <p:txBody>
-          <a:bodyPr wrap="square" lIns="0" tIns="0" rIns="0" bIns="0" rtlCol="0" anchor="ctr">
+            <a:ext cx="1252728" cy="311277"/>
+          </a:xfrm>
+          <a:prstGeom prst="rect">
+            <a:avLst/>
+          </a:prstGeom>
+          <a:noFill/>
+          <a:ln/>
+        </p:spPr>
+        <p:txBody>
+          <a:bodyPr wrap="square" lIns="0" tIns="0" rIns="0" bIns="0" rtlCol="0" anchor="t">
             <a:normAutofit/>
           </a:bodyPr>
           <a:lstStyle/>
@@ -3085,8 +3085,8 @@
         </p:nvSpPr>
         <p:spPr>
           <a:xfrm>
-            <a:off x="4846320" y="1719072"/>
-            <a:ext cx="1618488" cy="1527048"/>
+            <a:off x="4846320" y="1701165"/>
+            <a:ext cx="1618488" cy="1572387"/>
           </a:xfrm>
           <a:prstGeom prst="rect">
             <a:avLst/>
@@ -3233,16 +3233,16 @@
         <p:spPr>
           <a:xfrm>
             <a:off x="7397496" y="1335024"/>
-            <a:ext cx="1252728" cy="310896"/>
-          </a:xfrm>
-          <a:prstGeom prst="rect">
-            <a:avLst/>
-          </a:prstGeom>
-          <a:noFill/>
-          <a:ln/>
-        </p:spPr>
-        <p:txBody>
-          <a:bodyPr wrap="square" lIns="0" tIns="0" rIns="0" bIns="0" rtlCol="0" anchor="ctr">
+            <a:ext cx="1252728" cy="549402"/>
+          </a:xfrm>
+          <a:prstGeom prst="rect">
+            <a:avLst/>
+          </a:prstGeom>
+          <a:noFill/>
+          <a:ln/>
+        </p:spPr>
+        <p:txBody>
+          <a:bodyPr wrap="square" lIns="0" tIns="0" rIns="0" bIns="0" rtlCol="0" anchor="t">
             <a:normAutofit/>
           </a:bodyPr>
           <a:lstStyle/>
@@ -3273,8 +3273,8 @@
         </p:nvSpPr>
         <p:spPr>
           <a:xfrm>
-            <a:off x="7013448" y="1719072"/>
-            <a:ext cx="1618488" cy="1527048"/>
+            <a:off x="7013448" y="1939290"/>
+            <a:ext cx="1618488" cy="1334262"/>
           </a:xfrm>
           <a:prstGeom prst="rect">
             <a:avLst/>
@@ -4872,16 +4872,16 @@
         <p:spPr>
           <a:xfrm>
             <a:off x="896112" y="1335024"/>
-            <a:ext cx="1975104" cy="310896"/>
-          </a:xfrm>
-          <a:prstGeom prst="rect">
-            <a:avLst/>
-          </a:prstGeom>
-          <a:noFill/>
-          <a:ln/>
-        </p:spPr>
-        <p:txBody>
-          <a:bodyPr wrap="square" lIns="0" tIns="0" rIns="0" bIns="0" rtlCol="0" anchor="ctr">
+            <a:ext cx="1975104" cy="549402"/>
+          </a:xfrm>
+          <a:prstGeom prst="rect">
+            <a:avLst/>
+          </a:prstGeom>
+          <a:noFill/>
+          <a:ln/>
+        </p:spPr>
+        <p:txBody>
+          <a:bodyPr wrap="square" lIns="0" tIns="0" rIns="0" bIns="0" rtlCol="0" anchor="t">
             <a:normAutofit/>
           </a:bodyPr>
           <a:lstStyle/>
@@ -4912,8 +4912,8 @@
         </p:nvSpPr>
         <p:spPr>
           <a:xfrm>
-            <a:off x="512064" y="1719072"/>
-            <a:ext cx="2340864" cy="1527048"/>
+            <a:off x="512064" y="1939290"/>
+            <a:ext cx="2340864" cy="1334262"/>
           </a:xfrm>
           <a:prstGeom prst="rect">
             <a:avLst/>
@@ -5060,16 +5060,16 @@
         <p:spPr>
           <a:xfrm>
             <a:off x="3785616" y="1335024"/>
-            <a:ext cx="1975104" cy="310896"/>
-          </a:xfrm>
-          <a:prstGeom prst="rect">
-            <a:avLst/>
-          </a:prstGeom>
-          <a:noFill/>
-          <a:ln/>
-        </p:spPr>
-        <p:txBody>
-          <a:bodyPr wrap="square" lIns="0" tIns="0" rIns="0" bIns="0" rtlCol="0" anchor="ctr">
+            <a:ext cx="1975104" cy="549402"/>
+          </a:xfrm>
+          <a:prstGeom prst="rect">
+            <a:avLst/>
+          </a:prstGeom>
+          <a:noFill/>
+          <a:ln/>
+        </p:spPr>
+        <p:txBody>
+          <a:bodyPr wrap="square" lIns="0" tIns="0" rIns="0" bIns="0" rtlCol="0" anchor="t">
             <a:normAutofit/>
           </a:bodyPr>
           <a:lstStyle/>
@@ -5100,8 +5100,8 @@
         </p:nvSpPr>
         <p:spPr>
           <a:xfrm>
-            <a:off x="3401568" y="1719072"/>
-            <a:ext cx="2340864" cy="1527048"/>
+            <a:off x="3401568" y="1939290"/>
+            <a:ext cx="2340864" cy="1334262"/>
           </a:xfrm>
           <a:prstGeom prst="rect">
             <a:avLst/>
@@ -5248,16 +5248,16 @@
         <p:spPr>
           <a:xfrm>
             <a:off x="6675120" y="1335024"/>
-            <a:ext cx="1975104" cy="310896"/>
-          </a:xfrm>
-          <a:prstGeom prst="rect">
-            <a:avLst/>
-          </a:prstGeom>
-          <a:noFill/>
-          <a:ln/>
-        </p:spPr>
-        <p:txBody>
-          <a:bodyPr wrap="square" lIns="0" tIns="0" rIns="0" bIns="0" rtlCol="0" anchor="ctr">
+            <a:ext cx="1975104" cy="787527"/>
+          </a:xfrm>
+          <a:prstGeom prst="rect">
+            <a:avLst/>
+          </a:prstGeom>
+          <a:noFill/>
+          <a:ln/>
+        </p:spPr>
+        <p:txBody>
+          <a:bodyPr wrap="square" lIns="0" tIns="0" rIns="0" bIns="0" rtlCol="0" anchor="t">
             <a:normAutofit/>
           </a:bodyPr>
           <a:lstStyle/>
@@ -5288,8 +5288,8 @@
         </p:nvSpPr>
         <p:spPr>
           <a:xfrm>
-            <a:off x="6291072" y="1719072"/>
-            <a:ext cx="2340864" cy="1527048"/>
+            <a:off x="6291072" y="2177415"/>
+            <a:ext cx="2340864" cy="1096137"/>
           </a:xfrm>
           <a:prstGeom prst="rect">
             <a:avLst/>
